--- a/projects/marvin-stress-trauma/istss_salma_STROBE.pptx
+++ b/projects/marvin-stress-trauma/istss_salma_STROBE.pptx
@@ -1141,7 +1141,7 @@
           <a:lstStyle/>
           <a:p>
             <a:r>
-              <a:t>Both do. In Model A, each additional traumatic event is associated with about 15 percent higher prevalence of each condition. In Model B, living in a camp is associated with roughly twice the prevalence of PTSD and depression and nearly three times the prevalence of anxiety, after accounting for trauma. The trauma estimates hardly move when camp residence enters the model. These are two separable pathways: what happened to people, and where they now live.</a:t>
+              <a:t>Both do. In Model A, each additional traumatic event is associated with about 15 percent higher prevalence of each condition. In Model B, living in a camp is associated with roughly twice the prevalence of PTSD and depression and nearly three times the prevalence of anxiety, after accounting for trauma. The trauma estimates hardly move when camp residence enters the model. Note that it is these prevalence ratios, not the prevalences on the previous slides, that are adjusted. These are two separable pathways: what happened to people, and where they now live.</a:t>
             </a:r>
           </a:p>
         </p:txBody>
@@ -1454,7 +1454,7 @@
           <a:lstStyle/>
           <a:p>
             <a:r>
-              <a:t>Design-adjusted prevalence was 18.5 percent for probable PTSD, 21 percent for depression, and 20.7 percent for anxiety: at least one adult in five met criteria for each condition, and 30.4 percent met criteria for at least one. Those of you who read the program will see slightly different figures there; the abstract carried preliminary estimates, and these are the final estimates from the fully cleaned sample. The conditions travel together: among people with any condition, more than a third met criteria for all three. The design effects, close to seven, are the first sign that the burden clusters by community.</a:t>
+              <a:t>Prevalence was 18.5 percent for probable PTSD, 21 percent for depression, and 20.7 percent for anxiety. These are crude proportions; only the confidence intervals account for the clustered design. At that level, at least one adult in five met criteria for each condition, and 30.4 percent met criteria for at least one. Those of you who read the program will see slightly different figures there; the abstract carried preliminary estimates, and these are the final estimates from the fully cleaned sample. The conditions travel together: among people with any condition, more than a third met criteria for all three. The design effects, close to seven, are the first sign that the burden clusters by community.</a:t>
             </a:r>
           </a:p>
         </p:txBody>
@@ -11378,7 +11378,7 @@
                   <a:srgbClr val="D9D9D9"/>
                 </a:solidFill>
               </a:rPr>
-              <a:t>Multilevel models estimate community-level clustering (ICCs)</a:t>
+              <a:t>Multilevel models estimate community clustering (ICCs) · Prevalence: crude proportions with design-based 95% CIs (Stata svy: proportion)</a:t>
             </a:r>
           </a:p>
         </p:txBody>
@@ -11678,7 +11678,7 @@
                   <a:srgbClr val="D9D9D9"/>
                 </a:solidFill>
               </a:rPr>
-              <a:t>Survey-adjusted prevalence, six states (bars: 95% CI)</a:t>
+              <a:t>Prevalence, six states (bars: design-based 95% CI; Stata svy: proportion)</a:t>
             </a:r>
           </a:p>
         </p:txBody>
@@ -11920,7 +11920,7 @@
                   <a:srgbClr val="D9D9D9"/>
                 </a:solidFill>
               </a:rPr>
-              <a:t>Survey-adjusted PTSD prevalence, three contrasts (depression and anxiety follow the same pattern)</a:t>
+              <a:t>Unadjusted PTSD prevalence, three contrasts (depression and anxiety follow the same pattern)</a:t>
             </a:r>
           </a:p>
         </p:txBody>
